--- a/docs/reports/project-status-2026-06-04.pptx
+++ b/docs/reports/project-status-2026-06-04.pptx
@@ -8751,7 +8751,7 @@
                 <a:ea typeface="Calibri" pitchFamily="34" charset="-122"/>
                 <a:cs typeface="Calibri" pitchFamily="34" charset="-120"/>
               </a:rPr>
-              <a:t>common、model、client、user、app、screenshot、ai 模块逐步拆分</a:t>
+              <a:t>拆分 common/model/client 等核心模块</a:t>
             </a:r>
             <a:endParaRPr lang="en-US" sz="1040" dirty="0"/>
           </a:p>
